--- a/templates/dynamic/經訓-template.pptx
+++ b/templates/dynamic/經訓-template.pptx
@@ -126,6 +126,38 @@
 <file path=ppt/changesInfos/changesInfo1.xml><?xml version="1.0" encoding="utf-8"?>
 <pc:chgInfo xmlns:a="http://schemas.openxmlformats.org/drawingml/2006/main" xmlns:r="http://schemas.openxmlformats.org/officeDocument/2006/relationships" xmlns:ac="http://schemas.microsoft.com/office/drawing/2013/main/command" xmlns:pc="http://schemas.microsoft.com/office/powerpoint/2013/main/command">
   <pc:docChgLst>
+    <pc:chgData name="Sam Fung" userId="e9dde229f212a63a" providerId="LiveId" clId="{772144C9-46D8-46FD-A8F5-78B39915EB46}"/>
+    <pc:docChg chg="modSld">
+      <pc:chgData name="Sam Fung" userId="e9dde229f212a63a" providerId="LiveId" clId="{772144C9-46D8-46FD-A8F5-78B39915EB46}" dt="2026-09-04T15:37:59.708" v="48" actId="113"/>
+      <pc:docMkLst>
+        <pc:docMk/>
+      </pc:docMkLst>
+      <pc:sldChg chg="modSp mod setBg">
+        <pc:chgData name="Sam Fung" userId="e9dde229f212a63a" providerId="LiveId" clId="{772144C9-46D8-46FD-A8F5-78B39915EB46}" dt="2026-09-04T15:37:59.708" v="48" actId="113"/>
+        <pc:sldMkLst>
+          <pc:docMk/>
+          <pc:sldMk cId="0" sldId="256"/>
+        </pc:sldMkLst>
+        <pc:spChg chg="mod">
+          <ac:chgData name="Sam Fung" userId="e9dde229f212a63a" providerId="LiveId" clId="{772144C9-46D8-46FD-A8F5-78B39915EB46}" dt="2026-09-04T12:43:09.421" v="47" actId="14838"/>
+          <ac:spMkLst>
+            <pc:docMk/>
+            <pc:sldMk cId="0" sldId="256"/>
+            <ac:spMk id="5" creationId="{00000000-0000-0000-0000-000000000000}"/>
+          </ac:spMkLst>
+        </pc:spChg>
+        <pc:spChg chg="mod">
+          <ac:chgData name="Sam Fung" userId="e9dde229f212a63a" providerId="LiveId" clId="{772144C9-46D8-46FD-A8F5-78B39915EB46}" dt="2026-09-04T15:37:59.708" v="48" actId="113"/>
+          <ac:spMkLst>
+            <pc:docMk/>
+            <pc:sldMk cId="0" sldId="256"/>
+            <ac:spMk id="6" creationId="{00000000-0000-0000-0000-000000000000}"/>
+          </ac:spMkLst>
+        </pc:spChg>
+      </pc:sldChg>
+    </pc:docChg>
+  </pc:docChgLst>
+  <pc:docChgLst>
     <pc:chgData name="Sam Fung" userId="e9dde229f212a63a" providerId="LiveId" clId="{184DD35A-127C-4A14-B6F4-0B7EB3C2D1F4}"/>
     <pc:docChg chg="modSld">
       <pc:chgData name="Sam Fung" userId="e9dde229f212a63a" providerId="LiveId" clId="{184DD35A-127C-4A14-B6F4-0B7EB3C2D1F4}" dt="2026-09-02T15:20:14.581" v="1"/>
@@ -323,7 +355,7 @@
           <a:p>
             <a:fld id="{5BCAD085-E8A6-8845-BD4E-CB4CCA059FC4}" type="datetimeFigureOut">
               <a:rPr lang="en-US" smtClean="0"/>
-              <a:t>9/2/2026</a:t>
+              <a:t>9/4/2026</a:t>
             </a:fld>
             <a:endParaRPr lang="en-US"/>
           </a:p>
@@ -491,7 +523,7 @@
           <a:p>
             <a:fld id="{5BCAD085-E8A6-8845-BD4E-CB4CCA059FC4}" type="datetimeFigureOut">
               <a:rPr lang="en-US" smtClean="0"/>
-              <a:t>9/2/2026</a:t>
+              <a:t>9/4/2026</a:t>
             </a:fld>
             <a:endParaRPr lang="en-US"/>
           </a:p>
@@ -669,7 +701,7 @@
           <a:p>
             <a:fld id="{5BCAD085-E8A6-8845-BD4E-CB4CCA059FC4}" type="datetimeFigureOut">
               <a:rPr lang="en-US" smtClean="0"/>
-              <a:t>9/2/2026</a:t>
+              <a:t>9/4/2026</a:t>
             </a:fld>
             <a:endParaRPr lang="en-US"/>
           </a:p>
@@ -837,7 +869,7 @@
           <a:p>
             <a:fld id="{5BCAD085-E8A6-8845-BD4E-CB4CCA059FC4}" type="datetimeFigureOut">
               <a:rPr lang="en-US" smtClean="0"/>
-              <a:t>9/2/2026</a:t>
+              <a:t>9/4/2026</a:t>
             </a:fld>
             <a:endParaRPr lang="en-US"/>
           </a:p>
@@ -1082,7 +1114,7 @@
           <a:p>
             <a:fld id="{5BCAD085-E8A6-8845-BD4E-CB4CCA059FC4}" type="datetimeFigureOut">
               <a:rPr lang="en-US" smtClean="0"/>
-              <a:t>9/2/2026</a:t>
+              <a:t>9/4/2026</a:t>
             </a:fld>
             <a:endParaRPr lang="en-US"/>
           </a:p>
@@ -1367,7 +1399,7 @@
           <a:p>
             <a:fld id="{5BCAD085-E8A6-8845-BD4E-CB4CCA059FC4}" type="datetimeFigureOut">
               <a:rPr lang="en-US" smtClean="0"/>
-              <a:t>9/2/2026</a:t>
+              <a:t>9/4/2026</a:t>
             </a:fld>
             <a:endParaRPr lang="en-US"/>
           </a:p>
@@ -1786,7 +1818,7 @@
           <a:p>
             <a:fld id="{5BCAD085-E8A6-8845-BD4E-CB4CCA059FC4}" type="datetimeFigureOut">
               <a:rPr lang="en-US" smtClean="0"/>
-              <a:t>9/2/2026</a:t>
+              <a:t>9/4/2026</a:t>
             </a:fld>
             <a:endParaRPr lang="en-US"/>
           </a:p>
@@ -1903,7 +1935,7 @@
           <a:p>
             <a:fld id="{5BCAD085-E8A6-8845-BD4E-CB4CCA059FC4}" type="datetimeFigureOut">
               <a:rPr lang="en-US" smtClean="0"/>
-              <a:t>9/2/2026</a:t>
+              <a:t>9/4/2026</a:t>
             </a:fld>
             <a:endParaRPr lang="en-US"/>
           </a:p>
@@ -1998,7 +2030,7 @@
           <a:p>
             <a:fld id="{5BCAD085-E8A6-8845-BD4E-CB4CCA059FC4}" type="datetimeFigureOut">
               <a:rPr lang="en-US" smtClean="0"/>
-              <a:t>9/2/2026</a:t>
+              <a:t>9/4/2026</a:t>
             </a:fld>
             <a:endParaRPr lang="en-US"/>
           </a:p>
@@ -2273,7 +2305,7 @@
           <a:p>
             <a:fld id="{5BCAD085-E8A6-8845-BD4E-CB4CCA059FC4}" type="datetimeFigureOut">
               <a:rPr lang="en-US" smtClean="0"/>
-              <a:t>9/2/2026</a:t>
+              <a:t>9/4/2026</a:t>
             </a:fld>
             <a:endParaRPr lang="en-US"/>
           </a:p>
@@ -2525,7 +2557,7 @@
           <a:p>
             <a:fld id="{5BCAD085-E8A6-8845-BD4E-CB4CCA059FC4}" type="datetimeFigureOut">
               <a:rPr lang="en-US" smtClean="0"/>
-              <a:t>9/2/2026</a:t>
+              <a:t>9/4/2026</a:t>
             </a:fld>
             <a:endParaRPr lang="en-US"/>
           </a:p>
@@ -2736,7 +2768,7 @@
           <a:p>
             <a:fld id="{5BCAD085-E8A6-8845-BD4E-CB4CCA059FC4}" type="datetimeFigureOut">
               <a:rPr lang="en-US" smtClean="0"/>
-              <a:t>9/2/2026</a:t>
+              <a:t>9/4/2026</a:t>
             </a:fld>
             <a:endParaRPr lang="en-US"/>
           </a:p>
@@ -3099,12 +3131,32 @@
   <p:cSld>
     <p:bg>
       <p:bgPr>
-        <a:solidFill>
-          <a:schemeClr val="accent3">
-            <a:lumMod val="20000"/>
-            <a:lumOff val="80000"/>
-          </a:schemeClr>
-        </a:solidFill>
+        <a:gradFill>
+          <a:gsLst>
+            <a:gs pos="0">
+              <a:schemeClr val="accent3">
+                <a:lumMod val="40000"/>
+                <a:lumOff val="60000"/>
+              </a:schemeClr>
+            </a:gs>
+            <a:gs pos="50000">
+              <a:schemeClr val="accent3">
+                <a:lumMod val="20000"/>
+                <a:lumOff val="80000"/>
+              </a:schemeClr>
+            </a:gs>
+            <a:gs pos="83000">
+              <a:schemeClr val="accent3">
+                <a:lumMod val="10000"/>
+                <a:lumOff val="90000"/>
+              </a:schemeClr>
+            </a:gs>
+            <a:gs pos="100000">
+              <a:schemeClr val="bg1"/>
+            </a:gs>
+          </a:gsLst>
+          <a:lin ang="5400000" scaled="1"/>
+        </a:gradFill>
         <a:effectLst/>
       </p:bgPr>
     </p:bg>
@@ -3186,7 +3238,7 @@
               </a:lnSpc>
             </a:pPr>
             <a:r>
-              <a:rPr sz="4000" dirty="0">
+              <a:rPr sz="4000" b="1" dirty="0">
                 <a:solidFill>
                   <a:srgbClr val="121212"/>
                 </a:solidFill>
@@ -3226,8 +3278,15 @@
                 <a:solidFill>
                   <a:srgbClr val="141C23"/>
                 </a:solidFill>
-                <a:latin typeface="+mj-ea"/>
-                <a:ea typeface="+mj-ea"/>
+                <a:effectLst>
+                  <a:outerShdw blurRad="50800" dist="38100" dir="2700000" algn="tl" rotWithShape="0">
+                    <a:prstClr val="black">
+                      <a:alpha val="40000"/>
+                    </a:prstClr>
+                  </a:outerShdw>
+                </a:effectLst>
+                <a:latin typeface="新細明體" panose="02020500000000000000" pitchFamily="18" charset="-120"/>
+                <a:ea typeface="新細明體" panose="02020500000000000000" pitchFamily="18" charset="-120"/>
               </a:rPr>
               <a:t>{{SCRIPTURE_TITLE}}</a:t>
             </a:r>
